--- a/CircuitWise_ppt.pptx
+++ b/CircuitWise_ppt.pptx
@@ -5,7 +5,7 @@
     <p:sldMasterId id="2147483648" r:id="rId1"/>
   </p:sldMasterIdLst>
   <p:notesMasterIdLst>
-    <p:notesMasterId r:id="rId18"/>
+    <p:notesMasterId r:id="rId19"/>
   </p:notesMasterIdLst>
   <p:sldIdLst>
     <p:sldId id="256" r:id="rId2"/>
@@ -21,9 +21,10 @@
     <p:sldId id="266" r:id="rId12"/>
     <p:sldId id="270" r:id="rId13"/>
     <p:sldId id="271" r:id="rId14"/>
-    <p:sldId id="267" r:id="rId15"/>
-    <p:sldId id="268" r:id="rId16"/>
-    <p:sldId id="269" r:id="rId17"/>
+    <p:sldId id="272" r:id="rId15"/>
+    <p:sldId id="267" r:id="rId16"/>
+    <p:sldId id="268" r:id="rId17"/>
+    <p:sldId id="269" r:id="rId18"/>
   </p:sldIdLst>
   <p:sldSz cx="12192000" cy="6858000"/>
   <p:notesSz cx="6858000" cy="9144000"/>
@@ -122,6 +123,11 @@
       </a:defRPr>
     </a:lvl9pPr>
   </p:defaultTextStyle>
+  <p:extLst>
+    <p:ext uri="{EFAFB233-063F-42B5-8137-9DF3F51BA10A}">
+      <p15:sldGuideLst xmlns:p15="http://schemas.microsoft.com/office/powerpoint/2012/main"/>
+    </p:ext>
+  </p:extLst>
 </p:presentation>
 </file>
 
@@ -5521,259 +5527,52 @@
       </p:grpSpPr>
       <p:sp>
         <p:nvSpPr>
-          <p:cNvPr id="2" name="Title 1">
+          <p:cNvPr id="2" name="TextBox 1">
             <a:extLst>
               <a:ext uri="{FF2B5EF4-FFF2-40B4-BE49-F238E27FC236}">
-                <a16:creationId xmlns:a16="http://schemas.microsoft.com/office/drawing/2014/main" id="{17776E8D-73AB-A720-0B08-0DC376C8C7E1}"/>
+                <a16:creationId xmlns:a16="http://schemas.microsoft.com/office/drawing/2014/main" id="{03A820B4-D265-14F9-CEC0-F1030FC1E094}"/>
               </a:ext>
             </a:extLst>
           </p:cNvPr>
-          <p:cNvSpPr>
-            <a:spLocks noGrp="1"/>
-          </p:cNvSpPr>
-          <p:nvPr>
-            <p:ph type="title"/>
-          </p:nvPr>
-        </p:nvSpPr>
-        <p:spPr>
-          <a:xfrm>
-            <a:off x="919316" y="331839"/>
-            <a:ext cx="9601200" cy="658761"/>
-          </a:xfrm>
-        </p:spPr>
-        <p:txBody>
-          <a:bodyPr>
-            <a:normAutofit/>
+          <p:cNvSpPr txBox="1"/>
+          <p:nvPr/>
+        </p:nvSpPr>
+        <p:spPr>
+          <a:xfrm>
+            <a:off x="1514168" y="1130710"/>
+            <a:ext cx="8561575" cy="1384995"/>
+          </a:xfrm>
+          <a:prstGeom prst="rect">
+            <a:avLst/>
+          </a:prstGeom>
+          <a:noFill/>
+        </p:spPr>
+        <p:txBody>
+          <a:bodyPr wrap="none" rtlCol="0">
+            <a:spAutoFit/>
           </a:bodyPr>
           <a:lstStyle/>
           <a:p>
             <a:r>
-              <a:rPr lang="en-IN" sz="3200" b="1" dirty="0">
-                <a:latin typeface="Calibri" panose="020F0502020204030204" pitchFamily="34" charset="0"/>
-                <a:ea typeface="Calibri" panose="020F0502020204030204" pitchFamily="34" charset="0"/>
-                <a:cs typeface="Calibri" panose="020F0502020204030204" pitchFamily="34" charset="0"/>
-              </a:rPr>
-              <a:t>Optimization &amp; Responsible AI</a:t>
-            </a:r>
-          </a:p>
-        </p:txBody>
-      </p:sp>
-      <p:sp>
-        <p:nvSpPr>
-          <p:cNvPr id="3" name="Content Placeholder 2">
-            <a:extLst>
-              <a:ext uri="{FF2B5EF4-FFF2-40B4-BE49-F238E27FC236}">
-                <a16:creationId xmlns:a16="http://schemas.microsoft.com/office/drawing/2014/main" id="{1F5491AD-08A9-71EC-01A4-0755AE9F26F5}"/>
-              </a:ext>
-            </a:extLst>
-          </p:cNvPr>
-          <p:cNvSpPr>
-            <a:spLocks noGrp="1"/>
-          </p:cNvSpPr>
-          <p:nvPr>
-            <p:ph idx="1"/>
-          </p:nvPr>
-        </p:nvSpPr>
-        <p:spPr>
-          <a:xfrm>
-            <a:off x="919316" y="1154060"/>
-            <a:ext cx="9601200" cy="5010765"/>
-          </a:xfrm>
-        </p:spPr>
-        <p:txBody>
-          <a:bodyPr>
-            <a:normAutofit lnSpcReduction="10000"/>
-          </a:bodyPr>
-          <a:lstStyle/>
-          <a:p>
-            <a:r>
-              <a:rPr lang="en-IN" b="1" dirty="0"/>
-              <a:t>Energy Optimization</a:t>
-            </a:r>
-          </a:p>
-          <a:p>
-            <a:pPr marL="0" indent="0">
-              <a:buNone/>
-            </a:pPr>
-            <a:r>
-              <a:rPr lang="en-IN" dirty="0"/>
-              <a:t>      For a tested ESP32 + DHT22 scenario:</a:t>
-            </a:r>
-          </a:p>
-          <a:p>
-            <a:pPr lvl="1">
-              <a:buFont typeface="Wingdings" panose="05000000000000000000" pitchFamily="2" charset="2"/>
-              <a:buChar char="§"/>
-            </a:pPr>
-            <a:r>
-              <a:rPr lang="en-IN" dirty="0"/>
-              <a:t>ESP32 active time: </a:t>
-            </a:r>
-            <a:r>
-              <a:rPr lang="en-IN" b="1" dirty="0"/>
-              <a:t>10 min → 5 min</a:t>
-            </a:r>
-            <a:r>
-              <a:rPr lang="en-IN" dirty="0"/>
-              <a:t> </a:t>
-            </a:r>
-          </a:p>
-          <a:p>
-            <a:pPr lvl="1">
-              <a:buFont typeface="Wingdings" panose="05000000000000000000" pitchFamily="2" charset="2"/>
-              <a:buChar char="§"/>
-            </a:pPr>
-            <a:r>
-              <a:rPr lang="en-IN" dirty="0"/>
-              <a:t>Minimum active-time constraint: </a:t>
-            </a:r>
-            <a:r>
-              <a:rPr lang="en-IN" b="1" dirty="0"/>
-              <a:t>5 min</a:t>
-            </a:r>
-            <a:r>
-              <a:rPr lang="en-IN" dirty="0"/>
-              <a:t> </a:t>
-            </a:r>
-          </a:p>
-          <a:p>
-            <a:pPr lvl="1">
-              <a:buFont typeface="Wingdings" panose="05000000000000000000" pitchFamily="2" charset="2"/>
-              <a:buChar char="§"/>
-            </a:pPr>
-            <a:r>
-              <a:rPr lang="en-IN" dirty="0"/>
-              <a:t>Calculated potential energy reduction: </a:t>
-            </a:r>
-            <a:r>
-              <a:rPr lang="en-IN" b="1" dirty="0"/>
-              <a:t>30.67%</a:t>
-            </a:r>
-            <a:r>
-              <a:rPr lang="en-IN" dirty="0"/>
-              <a:t> </a:t>
-            </a:r>
-          </a:p>
-          <a:p>
-            <a:pPr lvl="1">
-              <a:buFont typeface="Wingdings" panose="05000000000000000000" pitchFamily="2" charset="2"/>
-              <a:buChar char="§"/>
-            </a:pPr>
-            <a:r>
-              <a:rPr lang="en-IN" dirty="0"/>
-              <a:t>This is a </a:t>
-            </a:r>
-            <a:r>
-              <a:rPr lang="en-IN" b="1" dirty="0"/>
-              <a:t>simulated/calculated scenario</a:t>
-            </a:r>
-            <a:r>
-              <a:rPr lang="en-IN" dirty="0"/>
-              <a:t>, not a hardware measurement. </a:t>
-            </a:r>
-          </a:p>
-          <a:p>
-            <a:r>
-              <a:rPr lang="en-IN" b="1" dirty="0"/>
-              <a:t>Responsible AI</a:t>
-            </a:r>
-          </a:p>
-          <a:p>
-            <a:pPr marL="0" indent="0">
-              <a:buNone/>
-            </a:pPr>
-            <a:r>
-              <a:rPr lang="en-IN" dirty="0"/>
-              <a:t>      </a:t>
-            </a:r>
-            <a:r>
-              <a:rPr lang="en-IN" dirty="0" err="1"/>
-              <a:t>CircuitWise</a:t>
-            </a:r>
-            <a:r>
-              <a:rPr lang="en-IN" dirty="0"/>
-              <a:t> AI follows these principles:</a:t>
-            </a:r>
-          </a:p>
-          <a:p>
-            <a:pPr lvl="1">
-              <a:buFont typeface="Wingdings" panose="05000000000000000000" pitchFamily="2" charset="2"/>
-              <a:buChar char="§"/>
-            </a:pPr>
-            <a:r>
-              <a:rPr lang="en-IN" b="1" dirty="0"/>
-              <a:t>Transparency:</a:t>
-            </a:r>
-            <a:r>
-              <a:rPr lang="en-IN" dirty="0"/>
-              <a:t> Calculation and AI prediction are shown separately. </a:t>
-            </a:r>
-          </a:p>
-          <a:p>
-            <a:pPr lvl="1">
-              <a:buFont typeface="Wingdings" panose="05000000000000000000" pitchFamily="2" charset="2"/>
-              <a:buChar char="§"/>
-            </a:pPr>
-            <a:r>
-              <a:rPr lang="en-IN" b="1" dirty="0"/>
-              <a:t>Honesty:</a:t>
-            </a:r>
-            <a:r>
-              <a:rPr lang="en-IN" dirty="0"/>
-              <a:t> Synthetic data is clearly identified. </a:t>
-            </a:r>
-          </a:p>
-          <a:p>
-            <a:pPr lvl="1">
-              <a:buFont typeface="Wingdings" panose="05000000000000000000" pitchFamily="2" charset="2"/>
-              <a:buChar char="§"/>
-            </a:pPr>
-            <a:r>
-              <a:rPr lang="en-IN" b="1" dirty="0"/>
-              <a:t>Human Oversight:</a:t>
-            </a:r>
-            <a:r>
-              <a:rPr lang="en-IN" dirty="0"/>
-              <a:t> Engineers make the final design decision. </a:t>
-            </a:r>
-          </a:p>
-          <a:p>
-            <a:pPr lvl="1">
-              <a:buFont typeface="Wingdings" panose="05000000000000000000" pitchFamily="2" charset="2"/>
-              <a:buChar char="§"/>
-            </a:pPr>
-            <a:r>
-              <a:rPr lang="en-IN" b="1" dirty="0"/>
-              <a:t>No Fabricated Measurements:</a:t>
-            </a:r>
-            <a:r>
-              <a:rPr lang="en-IN" dirty="0"/>
-              <a:t> Hardware results are not claimed before testing. </a:t>
-            </a:r>
-          </a:p>
-          <a:p>
-            <a:pPr lvl="1">
-              <a:buFont typeface="Wingdings" panose="05000000000000000000" pitchFamily="2" charset="2"/>
-              <a:buChar char="§"/>
-            </a:pPr>
-            <a:r>
-              <a:rPr lang="en-IN" b="1" dirty="0"/>
-              <a:t>Limitations:</a:t>
-            </a:r>
-            <a:r>
-              <a:rPr lang="en-IN" dirty="0"/>
-              <a:t> Model uncertainty and data limitations are reported.</a:t>
-            </a:r>
-          </a:p>
-          <a:p>
-            <a:endParaRPr lang="en-IN" dirty="0"/>
+              <a:rPr lang="en-US" sz="2800" b="1" dirty="0"/>
+              <a:t>GITHUB LINK</a:t>
+            </a:r>
+          </a:p>
+          <a:p>
+            <a:endParaRPr lang="en-US" sz="2800" dirty="0"/>
+          </a:p>
+          <a:p>
+            <a:r>
+              <a:rPr lang="en-IN" sz="2800" dirty="0"/>
+              <a:t>https://github.com/Priyanka-Balakumar/CircuitWise_AI</a:t>
+            </a:r>
           </a:p>
         </p:txBody>
       </p:sp>
     </p:spTree>
     <p:extLst>
       <p:ext uri="{BB962C8B-B14F-4D97-AF65-F5344CB8AC3E}">
-        <p14:creationId xmlns:p14="http://schemas.microsoft.com/office/powerpoint/2010/main" val="4180807389"/>
+        <p14:creationId xmlns:p14="http://schemas.microsoft.com/office/powerpoint/2010/main" val="1249767363"/>
       </p:ext>
     </p:extLst>
   </p:cSld>
@@ -5805,6 +5604,287 @@
           <p:cNvPr id="2" name="Title 1">
             <a:extLst>
               <a:ext uri="{FF2B5EF4-FFF2-40B4-BE49-F238E27FC236}">
+                <a16:creationId xmlns:a16="http://schemas.microsoft.com/office/drawing/2014/main" id="{17776E8D-73AB-A720-0B08-0DC376C8C7E1}"/>
+              </a:ext>
+            </a:extLst>
+          </p:cNvPr>
+          <p:cNvSpPr>
+            <a:spLocks noGrp="1"/>
+          </p:cNvSpPr>
+          <p:nvPr>
+            <p:ph type="title"/>
+          </p:nvPr>
+        </p:nvSpPr>
+        <p:spPr>
+          <a:xfrm>
+            <a:off x="919316" y="331839"/>
+            <a:ext cx="9601200" cy="658761"/>
+          </a:xfrm>
+        </p:spPr>
+        <p:txBody>
+          <a:bodyPr>
+            <a:normAutofit/>
+          </a:bodyPr>
+          <a:lstStyle/>
+          <a:p>
+            <a:r>
+              <a:rPr lang="en-IN" sz="3200" b="1" dirty="0">
+                <a:latin typeface="Calibri" panose="020F0502020204030204" pitchFamily="34" charset="0"/>
+                <a:ea typeface="Calibri" panose="020F0502020204030204" pitchFamily="34" charset="0"/>
+                <a:cs typeface="Calibri" panose="020F0502020204030204" pitchFamily="34" charset="0"/>
+              </a:rPr>
+              <a:t>Optimization &amp; Responsible AI</a:t>
+            </a:r>
+          </a:p>
+        </p:txBody>
+      </p:sp>
+      <p:sp>
+        <p:nvSpPr>
+          <p:cNvPr id="3" name="Content Placeholder 2">
+            <a:extLst>
+              <a:ext uri="{FF2B5EF4-FFF2-40B4-BE49-F238E27FC236}">
+                <a16:creationId xmlns:a16="http://schemas.microsoft.com/office/drawing/2014/main" id="{1F5491AD-08A9-71EC-01A4-0755AE9F26F5}"/>
+              </a:ext>
+            </a:extLst>
+          </p:cNvPr>
+          <p:cNvSpPr>
+            <a:spLocks noGrp="1"/>
+          </p:cNvSpPr>
+          <p:nvPr>
+            <p:ph idx="1"/>
+          </p:nvPr>
+        </p:nvSpPr>
+        <p:spPr>
+          <a:xfrm>
+            <a:off x="919316" y="1154060"/>
+            <a:ext cx="9601200" cy="5010765"/>
+          </a:xfrm>
+        </p:spPr>
+        <p:txBody>
+          <a:bodyPr>
+            <a:normAutofit lnSpcReduction="10000"/>
+          </a:bodyPr>
+          <a:lstStyle/>
+          <a:p>
+            <a:r>
+              <a:rPr lang="en-IN" b="1" dirty="0"/>
+              <a:t>Energy Optimization</a:t>
+            </a:r>
+          </a:p>
+          <a:p>
+            <a:pPr marL="0" indent="0">
+              <a:buNone/>
+            </a:pPr>
+            <a:r>
+              <a:rPr lang="en-IN" dirty="0"/>
+              <a:t>      For a tested ESP32 + DHT22 scenario:</a:t>
+            </a:r>
+          </a:p>
+          <a:p>
+            <a:pPr lvl="1">
+              <a:buFont typeface="Wingdings" panose="05000000000000000000" pitchFamily="2" charset="2"/>
+              <a:buChar char="§"/>
+            </a:pPr>
+            <a:r>
+              <a:rPr lang="en-IN" dirty="0"/>
+              <a:t>ESP32 active time: </a:t>
+            </a:r>
+            <a:r>
+              <a:rPr lang="en-IN" b="1" dirty="0"/>
+              <a:t>10 min → 5 min</a:t>
+            </a:r>
+            <a:r>
+              <a:rPr lang="en-IN" dirty="0"/>
+              <a:t> </a:t>
+            </a:r>
+          </a:p>
+          <a:p>
+            <a:pPr lvl="1">
+              <a:buFont typeface="Wingdings" panose="05000000000000000000" pitchFamily="2" charset="2"/>
+              <a:buChar char="§"/>
+            </a:pPr>
+            <a:r>
+              <a:rPr lang="en-IN" dirty="0"/>
+              <a:t>Minimum active-time constraint: </a:t>
+            </a:r>
+            <a:r>
+              <a:rPr lang="en-IN" b="1" dirty="0"/>
+              <a:t>5 min</a:t>
+            </a:r>
+            <a:r>
+              <a:rPr lang="en-IN" dirty="0"/>
+              <a:t> </a:t>
+            </a:r>
+          </a:p>
+          <a:p>
+            <a:pPr lvl="1">
+              <a:buFont typeface="Wingdings" panose="05000000000000000000" pitchFamily="2" charset="2"/>
+              <a:buChar char="§"/>
+            </a:pPr>
+            <a:r>
+              <a:rPr lang="en-IN" dirty="0"/>
+              <a:t>Calculated potential energy reduction: </a:t>
+            </a:r>
+            <a:r>
+              <a:rPr lang="en-IN" b="1" dirty="0"/>
+              <a:t>30.67%</a:t>
+            </a:r>
+            <a:r>
+              <a:rPr lang="en-IN" dirty="0"/>
+              <a:t> </a:t>
+            </a:r>
+          </a:p>
+          <a:p>
+            <a:pPr lvl="1">
+              <a:buFont typeface="Wingdings" panose="05000000000000000000" pitchFamily="2" charset="2"/>
+              <a:buChar char="§"/>
+            </a:pPr>
+            <a:r>
+              <a:rPr lang="en-IN" dirty="0"/>
+              <a:t>This is a </a:t>
+            </a:r>
+            <a:r>
+              <a:rPr lang="en-IN" b="1" dirty="0"/>
+              <a:t>simulated/calculated scenario</a:t>
+            </a:r>
+            <a:r>
+              <a:rPr lang="en-IN" dirty="0"/>
+              <a:t>, not a hardware measurement. </a:t>
+            </a:r>
+          </a:p>
+          <a:p>
+            <a:r>
+              <a:rPr lang="en-IN" b="1" dirty="0"/>
+              <a:t>Responsible AI</a:t>
+            </a:r>
+          </a:p>
+          <a:p>
+            <a:pPr marL="0" indent="0">
+              <a:buNone/>
+            </a:pPr>
+            <a:r>
+              <a:rPr lang="en-IN" dirty="0"/>
+              <a:t>      </a:t>
+            </a:r>
+            <a:r>
+              <a:rPr lang="en-IN" dirty="0" err="1"/>
+              <a:t>CircuitWise</a:t>
+            </a:r>
+            <a:r>
+              <a:rPr lang="en-IN" dirty="0"/>
+              <a:t> AI follows these principles:</a:t>
+            </a:r>
+          </a:p>
+          <a:p>
+            <a:pPr lvl="1">
+              <a:buFont typeface="Wingdings" panose="05000000000000000000" pitchFamily="2" charset="2"/>
+              <a:buChar char="§"/>
+            </a:pPr>
+            <a:r>
+              <a:rPr lang="en-IN" b="1" dirty="0"/>
+              <a:t>Transparency:</a:t>
+            </a:r>
+            <a:r>
+              <a:rPr lang="en-IN" dirty="0"/>
+              <a:t> Calculation and AI prediction are shown separately. </a:t>
+            </a:r>
+          </a:p>
+          <a:p>
+            <a:pPr lvl="1">
+              <a:buFont typeface="Wingdings" panose="05000000000000000000" pitchFamily="2" charset="2"/>
+              <a:buChar char="§"/>
+            </a:pPr>
+            <a:r>
+              <a:rPr lang="en-IN" b="1" dirty="0"/>
+              <a:t>Honesty:</a:t>
+            </a:r>
+            <a:r>
+              <a:rPr lang="en-IN" dirty="0"/>
+              <a:t> Synthetic data is clearly identified. </a:t>
+            </a:r>
+          </a:p>
+          <a:p>
+            <a:pPr lvl="1">
+              <a:buFont typeface="Wingdings" panose="05000000000000000000" pitchFamily="2" charset="2"/>
+              <a:buChar char="§"/>
+            </a:pPr>
+            <a:r>
+              <a:rPr lang="en-IN" b="1" dirty="0"/>
+              <a:t>Human Oversight:</a:t>
+            </a:r>
+            <a:r>
+              <a:rPr lang="en-IN" dirty="0"/>
+              <a:t> Engineers make the final design decision. </a:t>
+            </a:r>
+          </a:p>
+          <a:p>
+            <a:pPr lvl="1">
+              <a:buFont typeface="Wingdings" panose="05000000000000000000" pitchFamily="2" charset="2"/>
+              <a:buChar char="§"/>
+            </a:pPr>
+            <a:r>
+              <a:rPr lang="en-IN" b="1" dirty="0"/>
+              <a:t>No Fabricated Measurements:</a:t>
+            </a:r>
+            <a:r>
+              <a:rPr lang="en-IN" dirty="0"/>
+              <a:t> Hardware results are not claimed before testing. </a:t>
+            </a:r>
+          </a:p>
+          <a:p>
+            <a:pPr lvl="1">
+              <a:buFont typeface="Wingdings" panose="05000000000000000000" pitchFamily="2" charset="2"/>
+              <a:buChar char="§"/>
+            </a:pPr>
+            <a:r>
+              <a:rPr lang="en-IN" b="1" dirty="0"/>
+              <a:t>Limitations:</a:t>
+            </a:r>
+            <a:r>
+              <a:rPr lang="en-IN" dirty="0"/>
+              <a:t> Model uncertainty and data limitations are reported.</a:t>
+            </a:r>
+          </a:p>
+          <a:p>
+            <a:endParaRPr lang="en-IN" dirty="0"/>
+          </a:p>
+        </p:txBody>
+      </p:sp>
+    </p:spTree>
+    <p:extLst>
+      <p:ext uri="{BB962C8B-B14F-4D97-AF65-F5344CB8AC3E}">
+        <p14:creationId xmlns:p14="http://schemas.microsoft.com/office/powerpoint/2010/main" val="4180807389"/>
+      </p:ext>
+    </p:extLst>
+  </p:cSld>
+  <p:clrMapOvr>
+    <a:masterClrMapping/>
+  </p:clrMapOvr>
+</p:sld>
+</file>
+
+<file path=ppt/slides/slide16.xml><?xml version="1.0" encoding="utf-8"?>
+<p:sld xmlns:a="http://schemas.openxmlformats.org/drawingml/2006/main" xmlns:r="http://schemas.openxmlformats.org/officeDocument/2006/relationships" xmlns:p="http://schemas.openxmlformats.org/presentationml/2006/main">
+  <p:cSld>
+    <p:spTree>
+      <p:nvGrpSpPr>
+        <p:cNvPr id="1" name=""/>
+        <p:cNvGrpSpPr/>
+        <p:nvPr/>
+      </p:nvGrpSpPr>
+      <p:grpSpPr>
+        <a:xfrm>
+          <a:off x="0" y="0"/>
+          <a:ext cx="0" cy="0"/>
+          <a:chOff x="0" y="0"/>
+          <a:chExt cx="0" cy="0"/>
+        </a:xfrm>
+      </p:grpSpPr>
+      <p:sp>
+        <p:nvSpPr>
+          <p:cNvPr id="2" name="Title 1">
+            <a:extLst>
+              <a:ext uri="{FF2B5EF4-FFF2-40B4-BE49-F238E27FC236}">
                 <a16:creationId xmlns:a16="http://schemas.microsoft.com/office/drawing/2014/main" id="{2F8A16CD-99A0-3F47-7193-9ED556B5ADBA}"/>
               </a:ext>
             </a:extLst>
@@ -6048,7 +6128,7 @@
 </p:sld>
 </file>
 
-<file path=ppt/slides/slide16.xml><?xml version="1.0" encoding="utf-8"?>
+<file path=ppt/slides/slide17.xml><?xml version="1.0" encoding="utf-8"?>
 <p:sld xmlns:a="http://schemas.openxmlformats.org/drawingml/2006/main" xmlns:r="http://schemas.openxmlformats.org/officeDocument/2006/relationships" xmlns:p="http://schemas.openxmlformats.org/presentationml/2006/main">
   <p:cSld>
     <p:spTree>
